--- a/s03/descargables/S03_ALU_01_Presentacion.pptx
+++ b/s03/descargables/S03_ALU_01_Presentacion.pptx
@@ -9676,7 +9676,7 @@
                 <a:ea typeface="Cambria" pitchFamily="34" charset="-122"/>
                 <a:cs typeface="Cambria" pitchFamily="34" charset="-120"/>
               </a:rPr>
-              <a:t>Ustedes ya calificaron su manual la semana pasada</a:t>
+              <a:t>Su manual de hoy sale todo en «no cumple»</a:t>
             </a:r>
             <a:endParaRPr lang="en-US" sz="2800" dirty="0"/>
           </a:p>
@@ -9715,7 +9715,7 @@
                 <a:ea typeface="Arial" pitchFamily="34" charset="-122"/>
                 <a:cs typeface="Arial" pitchFamily="34" charset="-120"/>
               </a:rPr>
-              <a:t>Sin saberlo. Diez minutos para verlo.</a:t>
+              <a:t>Se los dije la semana pasada. Hoy escribimos el otro.</a:t>
             </a:r>
             <a:endParaRPr lang="en-US" sz="1300" dirty="0"/>
           </a:p>
@@ -9784,7 +9784,7 @@
                 <a:ea typeface="Arial" pitchFamily="34" charset="-122"/>
                 <a:cs typeface="Arial" pitchFamily="34" charset="-120"/>
               </a:rPr>
-              <a:t>La hoja «Controles» de la matriz les hizo recorrer las catorce fracciones del RCG 37 Bis y, por cada una, escribir el numeral de su manual que la prevé, la evidencia de aplicación efectiva y dónde se resguarda.</a:t>
+              <a:t>En la matriz vimos la hoja donde se califica el manual contra las catorce fracciones del RCG 37 Bis. Y ahí les dije, textual: «¿este qué manual califico, el de ahorita? El de ahorita no va a tener nada de esto, va a salir todo en no cumple. Va a ser el nuevo que tú ya vas a tener desarrollado.»</a:t>
             </a:r>
             <a:endParaRPr lang="en-US" sz="1350" dirty="0"/>
           </a:p>
@@ -9850,7 +9850,7 @@
                 <a:ea typeface="Arial" pitchFamily="34" charset="-122"/>
                 <a:cs typeface="Arial" pitchFamily="34" charset="-120"/>
               </a:rPr>
-              <a:t>SI QUEDÓ EN CERO</a:t>
+              <a:t>LA HOJA PIDE TRES COSAS</a:t>
             </a:r>
             <a:endParaRPr lang="en-US" sz="1100" dirty="0"/>
           </a:p>
@@ -9892,7 +9892,7 @@
                 <a:ea typeface="Arial" pitchFamily="34" charset="-122"/>
                 <a:cs typeface="Arial" pitchFamily="34" charset="-120"/>
               </a:rPr>
-              <a:t>La obligación no computa</a:t>
+              <a:t>Numeral, evidencia y resguardo</a:t>
             </a:r>
             <a:endParaRPr lang="en-US" sz="1350" dirty="0"/>
           </a:p>
@@ -9934,7 +9934,7 @@
                 <a:ea typeface="Arial" pitchFamily="34" charset="-122"/>
                 <a:cs typeface="Arial" pitchFamily="34" charset="-120"/>
               </a:rPr>
-              <a:t>Un numeral bien redactado sin evidencia de aplicación no suma nada. Ésa es la lista de hoy.</a:t>
+              <a:t>Y ninguna de las tres se contesta con el texto de la ley. Las tres se contestan con su propio documento.</a:t>
             </a:r>
             <a:endParaRPr lang="en-US" sz="1150" dirty="0"/>
           </a:p>
@@ -10000,7 +10000,7 @@
                 <a:ea typeface="Arial" pitchFamily="34" charset="-122"/>
                 <a:cs typeface="Arial" pitchFamily="34" charset="-120"/>
               </a:rPr>
-              <a:t>SI PUSIERON «NO APLICA»</a:t>
+              <a:t>POR ESO NO ERA TAREA</a:t>
             </a:r>
             <a:endParaRPr lang="en-US" sz="1100" dirty="0"/>
           </a:p>
@@ -10042,7 +10042,7 @@
                 <a:ea typeface="Arial" pitchFamily="34" charset="-122"/>
                 <a:cs typeface="Arial" pitchFamily="34" charset="-120"/>
               </a:rPr>
-              <a:t>Hay que justificarlo</a:t>
+              <a:t>No había qué calificar todavía</a:t>
             </a:r>
             <a:endParaRPr lang="en-US" sz="1350" dirty="0"/>
           </a:p>
@@ -10084,7 +10084,7 @@
                 <a:ea typeface="Arial" pitchFamily="34" charset="-122"/>
                 <a:cs typeface="Arial" pitchFamily="34" charset="-120"/>
               </a:rPr>
-              <a:t>Se los prometí la semana pasada y hoy lo cumplimos: va dentro del manual, con el motivo escrito.</a:t>
+              <a:t>Manual y metodología se construyen en paralelo, y los dos vencen el 1 de marzo de 2027.</a:t>
             </a:r>
             <a:endParaRPr lang="en-US" sz="1150" dirty="0"/>
           </a:p>
@@ -10150,7 +10150,7 @@
                 <a:ea typeface="Arial" pitchFamily="34" charset="-122"/>
                 <a:cs typeface="Arial" pitchFamily="34" charset="-120"/>
               </a:rPr>
-              <a:t>SI NO TENÍAN NUMERAL</a:t>
+              <a:t>LO QUE SE LLEVAN HOY</a:t>
             </a:r>
             <a:endParaRPr lang="en-US" sz="1100" dirty="0"/>
           </a:p>
@@ -10192,7 +10192,7 @@
                 <a:ea typeface="Arial" pitchFamily="34" charset="-122"/>
                 <a:cs typeface="Arial" pitchFamily="34" charset="-120"/>
               </a:rPr>
-              <a:t>Ése es el apartado que falta</a:t>
+              <a:t>Un apartado escrito</a:t>
             </a:r>
             <a:endParaRPr lang="en-US" sz="1350" dirty="0"/>
           </a:p>
@@ -10234,7 +10234,7 @@
                 <a:ea typeface="Arial" pitchFamily="34" charset="-122"/>
                 <a:cs typeface="Arial" pitchFamily="34" charset="-120"/>
               </a:rPr>
-              <a:t>Hoy sale con su fundamento, su cláusula modelo y su evidencia.</a:t>
+              <a:t>Con su fundamento, su cláusula modelo, su evidencia — y el método para escribir los trece restantes.</a:t>
             </a:r>
             <a:endParaRPr lang="en-US" sz="1150" dirty="0"/>
           </a:p>

--- a/s03/descargables/S03_ALU_01_Presentacion.pptx
+++ b/s03/descargables/S03_ALU_01_Presentacion.pptx
@@ -3869,7 +3869,7 @@
                 <a:ea typeface="Arial" pitchFamily="34" charset="-122"/>
                 <a:cs typeface="Arial" pitchFamily="34" charset="-120"/>
               </a:rPr>
-              <a:t>El vocabulario no hay que inventarlo. Lo da la norma, y son cuatro escalones.</a:t>
+              <a:t>Cada obligación se desarrolla completa. Catorce veces, el mismo recorrido.</a:t>
             </a:r>
             <a:endParaRPr lang="en-US" sz="1300" dirty="0"/>
           </a:p>
@@ -4056,7 +4056,7 @@
                 <a:ea typeface="Arial" pitchFamily="34" charset="-122"/>
                 <a:cs typeface="Arial" pitchFamily="34" charset="-120"/>
               </a:rPr>
-              <a:t>Política</a:t>
+              <a:t>La regla</a:t>
             </a:r>
             <a:endParaRPr lang="en-US" sz="1500" dirty="0"/>
           </a:p>
@@ -4098,7 +4098,7 @@
                 <a:ea typeface="Arial" pitchFamily="34" charset="-122"/>
                 <a:cs typeface="Arial" pitchFamily="34" charset="-120"/>
               </a:rPr>
-              <a:t>La decisión de la casa</a:t>
+              <a:t>Qué exige la norma. Se cita</a:t>
             </a:r>
             <a:endParaRPr lang="en-US" sz="1000" dirty="0"/>
           </a:p>
@@ -4140,7 +4140,7 @@
                 <a:ea typeface="Arial" pitchFamily="34" charset="-122"/>
                 <a:cs typeface="Arial" pitchFamily="34" charset="-120"/>
               </a:rPr>
-              <a:t>¿Qué decidimos?</a:t>
+              <a:t>¿Qué me piden?</a:t>
             </a:r>
             <a:endParaRPr lang="en-US" sz="950" dirty="0"/>
           </a:p>
@@ -4245,7 +4245,7 @@
                 <a:ea typeface="Arial" pitchFamily="34" charset="-122"/>
                 <a:cs typeface="Arial" pitchFamily="34" charset="-120"/>
               </a:rPr>
-              <a:t>Criterio</a:t>
+              <a:t>El criterio</a:t>
             </a:r>
             <a:endParaRPr lang="en-US" sz="1500" dirty="0"/>
           </a:p>
@@ -4287,7 +4287,7 @@
                 <a:ea typeface="Arial" pitchFamily="34" charset="-122"/>
                 <a:cs typeface="Arial" pitchFamily="34" charset="-120"/>
               </a:rPr>
-              <a:t>La regla que resuelve el caso dudoso</a:t>
+              <a:t>Cómo se traduce esa regla a MI operación: umbrales y supuestos</a:t>
             </a:r>
             <a:endParaRPr lang="en-US" sz="1000" dirty="0"/>
           </a:p>
@@ -4329,7 +4329,7 @@
                 <a:ea typeface="Arial" pitchFamily="34" charset="-122"/>
                 <a:cs typeface="Arial" pitchFamily="34" charset="-120"/>
               </a:rPr>
-              <a:t>¿Cuándo? ¿Qué cuenta como qué?</a:t>
+              <a:t>¿Qué cuenta como qué, aquí?</a:t>
             </a:r>
             <a:endParaRPr lang="en-US" sz="950" dirty="0"/>
           </a:p>
@@ -4434,7 +4434,7 @@
                 <a:ea typeface="Arial" pitchFamily="34" charset="-122"/>
                 <a:cs typeface="Arial" pitchFamily="34" charset="-120"/>
               </a:rPr>
-              <a:t>Medida</a:t>
+              <a:t>El procedimiento</a:t>
             </a:r>
             <a:endParaRPr lang="en-US" sz="1500" dirty="0"/>
           </a:p>
@@ -4476,7 +4476,7 @@
                 <a:ea typeface="Arial" pitchFamily="34" charset="-122"/>
                 <a:cs typeface="Arial" pitchFamily="34" charset="-120"/>
               </a:rPr>
-              <a:t>El control concreto</a:t>
+              <a:t>Quién, en qué orden, en qué plazo, con qué herramienta</a:t>
             </a:r>
             <a:endParaRPr lang="en-US" sz="1000" dirty="0"/>
           </a:p>
@@ -4518,7 +4518,7 @@
                 <a:ea typeface="Arial" pitchFamily="34" charset="-122"/>
                 <a:cs typeface="Arial" pitchFamily="34" charset="-120"/>
               </a:rPr>
-              <a:t>¿Qué se hace para que se cumpla?</a:t>
+              <a:t>¿Cómo se ejecuta?</a:t>
             </a:r>
             <a:endParaRPr lang="en-US" sz="950" dirty="0"/>
           </a:p>
@@ -4623,7 +4623,7 @@
                 <a:ea typeface="Arial" pitchFamily="34" charset="-122"/>
                 <a:cs typeface="Arial" pitchFamily="34" charset="-120"/>
               </a:rPr>
-              <a:t>Procedimiento</a:t>
+              <a:t>La evidencia</a:t>
             </a:r>
             <a:endParaRPr lang="en-US" sz="1500" dirty="0"/>
           </a:p>
@@ -4665,7 +4665,7 @@
                 <a:ea typeface="Arial" pitchFamily="34" charset="-122"/>
                 <a:cs typeface="Arial" pitchFamily="34" charset="-120"/>
               </a:rPr>
-              <a:t>Pasos con responsable, plazo y evidencia</a:t>
+              <a:t>Qué rastro deja cada paso y dónde se resguarda</a:t>
             </a:r>
             <a:endParaRPr lang="en-US" sz="1000" dirty="0"/>
           </a:p>
@@ -4707,7 +4707,7 @@
                 <a:ea typeface="Arial" pitchFamily="34" charset="-122"/>
                 <a:cs typeface="Arial" pitchFamily="34" charset="-120"/>
               </a:rPr>
-              <a:t>¿Cómo, y cómo se prueba?</a:t>
+              <a:t>¿Cómo lo demuestro?</a:t>
             </a:r>
             <a:endParaRPr lang="en-US" sz="950" dirty="0"/>
           </a:p>
@@ -4774,7 +4774,7 @@
                 <a:ea typeface="Arial" pitchFamily="34" charset="-122"/>
                 <a:cs typeface="Arial" pitchFamily="34" charset="-120"/>
               </a:rPr>
-              <a:t>El 37 Bis dice en cada fracción qué tipo de texto quiere.</a:t>
+              <a:t>Los sustantivos del 37 Bis no reparten el trabajo.</a:t>
             </a:r>
             <a:pPr indent="0" marL="0">
               <a:lnSpc>
@@ -4791,7 +4791,7 @@
                 <a:ea typeface="Arial" pitchFamily="34" charset="-122"/>
                 <a:cs typeface="Arial" pitchFamily="34" charset="-120"/>
               </a:rPr>
-              <a:t>  La I pide criterios; la III y la XIII, medidas; la IV, VI y XIV, procedimientos; la II, V, VII, VIII, IX y XII, mecanismos.</a:t>
+              <a:t>  La fracción I dice «criterios» para la identificación, y el RCG 11 —misma obligación— pide criterios, MEDIDAS y PROCEDIMIENTOS. Es variación de redacción, no un reparto.</a:t>
             </a:r>
             <a:endParaRPr lang="en-US" sz="1200" dirty="0"/>
           </a:p>
@@ -5212,7 +5212,7 @@
                 <a:ea typeface="Arial" pitchFamily="34" charset="-122"/>
                 <a:cs typeface="Arial" pitchFamily="34" charset="-120"/>
               </a:rPr>
-              <a:t>Escriban los cuatro escalones: política de una frase, criterio que resuelva la discusión que ese tema les provoca, medida que ya exista, y el procedimiento en tabla.</a:t>
+              <a:t>Escriban los cuatro planos: la regla citada, el criterio que resuelva la discusión que ese tema les provoca, el procedimiento en tabla y la evidencia de cada paso.</a:t>
             </a:r>
             <a:endParaRPr lang="en-US" sz="1350" dirty="0"/>
           </a:p>
@@ -5378,7 +5378,7 @@
                 <a:ea typeface="Arial" pitchFamily="34" charset="-122"/>
                 <a:cs typeface="Arial" pitchFamily="34" charset="-120"/>
               </a:rPr>
-              <a:t>Pásenlo por la lista de nueve preguntas del apartado 11 de la guía, y escriban en el chat cuáles no pasaron.</a:t>
+              <a:t>Pásenlo por la lista de nueve preguntas del apartado 12 de la guía, y escriban en el chat cuáles no pasaron.</a:t>
             </a:r>
             <a:endParaRPr lang="en-US" sz="1350" dirty="0"/>
           </a:p>
@@ -9676,7 +9676,7 @@
                 <a:ea typeface="Cambria" pitchFamily="34" charset="-122"/>
                 <a:cs typeface="Cambria" pitchFamily="34" charset="-120"/>
               </a:rPr>
-              <a:t>Su manual de hoy sale todo en «no cumple»</a:t>
+              <a:t>Empecemos por saber dónde están</a:t>
             </a:r>
             <a:endParaRPr lang="en-US" sz="2800" dirty="0"/>
           </a:p>
@@ -9715,7 +9715,7 @@
                 <a:ea typeface="Arial" pitchFamily="34" charset="-122"/>
                 <a:cs typeface="Arial" pitchFamily="34" charset="-120"/>
               </a:rPr>
-              <a:t>Se los dije la semana pasada. Hoy escribimos el otro.</a:t>
+              <a:t>Cinco minutos. Dieciocho renglones. Calificación en el momento.</a:t>
             </a:r>
             <a:endParaRPr lang="en-US" sz="1300" dirty="0"/>
           </a:p>
@@ -9784,7 +9784,7 @@
                 <a:ea typeface="Arial" pitchFamily="34" charset="-122"/>
                 <a:cs typeface="Arial" pitchFamily="34" charset="-120"/>
               </a:rPr>
-              <a:t>En la matriz vimos la hoja donde se califica el manual contra las catorce fracciones del RCG 37 Bis. Y ahí les dije, textual: «¿este qué manual califico, el de ahorita? El de ahorita no va a tener nada de esto, va a salir todo en no cumple. Va a ser el nuevo que tú ya vas a tener desarrollado.»</a:t>
+              <a:t>Abran el DIAGNÓSTICO en el aula. Los catorce apartados del contenido mínimo del RCG 37 Bis, más el diseño de la metodología, el procedimiento de apertura y terminación, y la declaración de lo que ustedes NO realizan. Lo contestan ahí mismo, les califica solo, y les dice qué escribir primero.</a:t>
             </a:r>
             <a:endParaRPr lang="en-US" sz="1350" dirty="0"/>
           </a:p>
@@ -9850,7 +9850,7 @@
                 <a:ea typeface="Arial" pitchFamily="34" charset="-122"/>
                 <a:cs typeface="Arial" pitchFamily="34" charset="-120"/>
               </a:rPr>
-              <a:t>LA HOJA PIDE TRES COSAS</a:t>
+              <a:t>CUATRO RESPUESTAS</a:t>
             </a:r>
             <a:endParaRPr lang="en-US" sz="1100" dirty="0"/>
           </a:p>
@@ -9892,7 +9892,7 @@
                 <a:ea typeface="Arial" pitchFamily="34" charset="-122"/>
                 <a:cs typeface="Arial" pitchFamily="34" charset="-120"/>
               </a:rPr>
-              <a:t>Numeral, evidencia y resguardo</a:t>
+              <a:t>Lo tengo · A medias · No lo tengo · No aplica</a:t>
             </a:r>
             <a:endParaRPr lang="en-US" sz="1350" dirty="0"/>
           </a:p>
@@ -9934,7 +9934,7 @@
                 <a:ea typeface="Arial" pitchFamily="34" charset="-122"/>
                 <a:cs typeface="Arial" pitchFamily="34" charset="-120"/>
               </a:rPr>
-              <a:t>Y ninguna de las tres se contesta con el texto de la ley. Las tres se contestan con su propio documento.</a:t>
+              <a:t>«A medias» vale medio punto. «No aplica» sale de la base y no castiga la calificación.</a:t>
             </a:r>
             <a:endParaRPr lang="en-US" sz="1150" dirty="0"/>
           </a:p>
@@ -10000,7 +10000,7 @@
                 <a:ea typeface="Arial" pitchFamily="34" charset="-122"/>
                 <a:cs typeface="Arial" pitchFamily="34" charset="-120"/>
               </a:rPr>
-              <a:t>POR ESO NO ERA TAREA</a:t>
+              <a:t>SI SALE ROJO, ES LO ESPERABLE</a:t>
             </a:r>
             <a:endParaRPr lang="en-US" sz="1100" dirty="0"/>
           </a:p>
@@ -10042,7 +10042,7 @@
                 <a:ea typeface="Arial" pitchFamily="34" charset="-122"/>
                 <a:cs typeface="Arial" pitchFamily="34" charset="-120"/>
               </a:rPr>
-              <a:t>No había qué calificar todavía</a:t>
+              <a:t>No es una calificación de nadie</a:t>
             </a:r>
             <a:endParaRPr lang="en-US" sz="1350" dirty="0"/>
           </a:p>
@@ -10084,7 +10084,7 @@
                 <a:ea typeface="Arial" pitchFamily="34" charset="-122"/>
                 <a:cs typeface="Arial" pitchFamily="34" charset="-120"/>
               </a:rPr>
-              <a:t>Manual y metodología se construyen en paralelo, y los dos vencen el 1 de marzo de 2027.</a:t>
+              <a:t>El Manual vence el 1 de marzo de 2027. Lo que importa no es el número: es CUÁLES salieron mal.</a:t>
             </a:r>
             <a:endParaRPr lang="en-US" sz="1150" dirty="0"/>
           </a:p>
@@ -10150,7 +10150,7 @@
                 <a:ea typeface="Arial" pitchFamily="34" charset="-122"/>
                 <a:cs typeface="Arial" pitchFamily="34" charset="-120"/>
               </a:rPr>
-              <a:t>LO QUE SE LLEVAN HOY</a:t>
+              <a:t>LOS MARCADOS EN ROJO</a:t>
             </a:r>
             <a:endParaRPr lang="en-US" sz="1100" dirty="0"/>
           </a:p>
@@ -10192,7 +10192,7 @@
                 <a:ea typeface="Arial" pitchFamily="34" charset="-122"/>
                 <a:cs typeface="Arial" pitchFamily="34" charset="-120"/>
               </a:rPr>
-              <a:t>Un apartado escrito</a:t>
+              <a:t>Ya son exigibles hoy</a:t>
             </a:r>
             <a:endParaRPr lang="en-US" sz="1350" dirty="0"/>
           </a:p>
@@ -10234,7 +10234,7 @@
                 <a:ea typeface="Arial" pitchFamily="34" charset="-122"/>
                 <a:cs typeface="Arial" pitchFamily="34" charset="-120"/>
               </a:rPr>
-              <a:t>Con su fundamento, su cláusula modelo, su evidencia — y el método para escribir los trece restantes.</a:t>
+              <a:t>Criticidad crítica significa que la obligación viene del artículo 18 fracciones I a VI o del 20, vigentes desde julio de 2025.</a:t>
             </a:r>
             <a:endParaRPr lang="en-US" sz="1150" dirty="0"/>
           </a:p>
@@ -14565,6 +14565,89 @@
           </a:p>
         </p:txBody>
       </p:sp>
+      <p:sp>
+        <p:nvSpPr>
+          <p:cNvPr id="13" name="Text 11"/>
+          <p:cNvSpPr txBox="1"/>
+          <p:nvPr/>
+        </p:nvSpPr>
+        <p:spPr>
+          <a:xfrm>
+            <a:off x="685800" y="4407408"/>
+            <a:ext cx="310896" cy="310896"/>
+          </a:xfrm>
+          <a:prstGeom prst="rect">
+            <a:avLst/>
+          </a:prstGeom>
+          <a:solidFill>
+            <a:srgbClr val="F2A541"/>
+          </a:solidFill>
+          <a:ln/>
+        </p:spPr>
+        <p:txBody>
+          <a:bodyPr wrap="square" lIns="0" tIns="0" rIns="0" bIns="0" rtlCol="0" anchor="ctr"/>
+          <a:lstStyle/>
+          <a:p>
+            <a:pPr algn="ctr" indent="0" marL="0">
+              <a:buNone/>
+            </a:pPr>
+            <a:r>
+              <a:rPr lang="en-US" sz="1400" b="1" dirty="0">
+                <a:solidFill>
+                  <a:srgbClr val="12224A"/>
+                </a:solidFill>
+                <a:latin typeface="Cambria" pitchFamily="34" charset="0"/>
+                <a:ea typeface="Cambria" pitchFamily="34" charset="-122"/>
+                <a:cs typeface="Cambria" pitchFamily="34" charset="-120"/>
+              </a:rPr>
+              <a:t>5</a:t>
+            </a:r>
+            <a:endParaRPr lang="en-US" sz="1400" dirty="0"/>
+          </a:p>
+        </p:txBody>
+      </p:sp>
+      <p:sp>
+        <p:nvSpPr>
+          <p:cNvPr id="14" name="Text 12"/>
+          <p:cNvSpPr txBox="1"/>
+          <p:nvPr/>
+        </p:nvSpPr>
+        <p:spPr>
+          <a:xfrm>
+            <a:off x="1133856" y="4370832"/>
+            <a:ext cx="7315200" cy="402336"/>
+          </a:xfrm>
+          <a:prstGeom prst="rect">
+            <a:avLst/>
+          </a:prstGeom>
+          <a:noFill/>
+          <a:ln/>
+        </p:spPr>
+        <p:txBody>
+          <a:bodyPr wrap="square" lIns="0" tIns="0" rIns="0" bIns="0" rtlCol="0" anchor="ctr"/>
+          <a:lstStyle/>
+          <a:p>
+            <a:pPr indent="0" marL="0">
+              <a:lnSpc>
+                <a:spcPts val="1800"/>
+              </a:lnSpc>
+              <a:buNone/>
+            </a:pPr>
+            <a:r>
+              <a:rPr lang="en-US" sz="1350" dirty="0">
+                <a:solidFill>
+                  <a:srgbClr val="E8EBF2"/>
+                </a:solidFill>
+                <a:latin typeface="Arial" pitchFamily="34" charset="0"/>
+                <a:ea typeface="Arial" pitchFamily="34" charset="-122"/>
+                <a:cs typeface="Arial" pitchFamily="34" charset="-120"/>
+              </a:rPr>
+              <a:t>Hoja «Constancia y difusión»: los ocho puntos que debe traer la constancia, y los canales de difusión — que es la mitad del artículo que casi nadie documenta.</a:t>
+            </a:r>
+            <a:endParaRPr lang="en-US" sz="1350" dirty="0"/>
+          </a:p>
+        </p:txBody>
+      </p:sp>
     </p:spTree>
   </p:cSld>
   <p:clrMapOvr>
@@ -18703,7 +18786,7 @@
                 <a:ea typeface="Arial" pitchFamily="34" charset="-122"/>
                 <a:cs typeface="Arial" pitchFamily="34" charset="-120"/>
               </a:rPr>
-              <a:t>Siete hojas, con el semáforo de contenidos mínimos</a:t>
+              <a:t>Ocho hojas, con el semáforo de contenidos mínimos</a:t>
             </a:r>
             <a:endParaRPr lang="en-US" sz="1200" dirty="0"/>
           </a:p>
